--- a/slide.pptx
+++ b/slide.pptx
@@ -12,8 +12,8 @@
     <p:sldId id="260" r:id="rId7"/>
     <p:sldId id="265" r:id="rId8"/>
     <p:sldId id="261" r:id="rId9"/>
-    <p:sldId id="266" r:id="rId10"/>
-    <p:sldId id="262" r:id="rId11"/>
+    <p:sldId id="262" r:id="rId10"/>
+    <p:sldId id="266" r:id="rId11"/>
     <p:sldId id="267" r:id="rId12"/>
     <p:sldId id="264" r:id="rId13"/>
   </p:sldIdLst>
@@ -117,7 +117,7 @@
   <p:extLst>
     <p:ext uri="{EFAFB233-063F-42B5-8137-9DF3F51BA10A}">
       <p15:sldGuideLst xmlns:p15="http://schemas.microsoft.com/office/powerpoint/2012/main">
-        <p15:guide id="1" orient="horz" pos="2136" userDrawn="1">
+        <p15:guide id="1" orient="horz" pos="2139" userDrawn="1">
           <p15:clr>
             <a:srgbClr val="A4A3A4"/>
           </p15:clr>
@@ -3000,40 +3000,24 @@
             </a:pPr>
             <a:r>
               <a:rPr lang="en-US" sz="3200" b="1">
-                <a:ln/>
                 <a:solidFill>
                   <a:schemeClr val="accent1">
                     <a:lumMod val="75000"/>
                   </a:schemeClr>
                 </a:solidFill>
-                <a:effectLst>
-                  <a:outerShdw blurRad="38100" dist="25400" dir="5400000" algn="ctr" rotWithShape="0">
-                    <a:srgbClr val="6E747A">
-                      <a:alpha val="43000"/>
-                      <a:alpha val="43000"/>
-                    </a:srgbClr>
-                  </a:outerShdw>
-                </a:effectLst>
+                <a:effectLst/>
                 <a:latin typeface="Times New Roman" panose="02020603050405020304" charset="0"/>
                 <a:cs typeface="Times New Roman" panose="02020603050405020304" charset="0"/>
               </a:rPr>
               <a:t>TRƯỜNG ĐẠI HỌC CÔNG NGHỆ  SÀI GÒN</a:t>
             </a:r>
             <a:endParaRPr lang="en-US" sz="3200" b="1">
-              <a:ln/>
               <a:solidFill>
                 <a:schemeClr val="accent1">
                   <a:lumMod val="75000"/>
                 </a:schemeClr>
               </a:solidFill>
-              <a:effectLst>
-                <a:outerShdw blurRad="38100" dist="25400" dir="5400000" algn="ctr" rotWithShape="0">
-                  <a:srgbClr val="6E747A">
-                    <a:alpha val="43000"/>
-                    <a:alpha val="43000"/>
-                  </a:srgbClr>
-                </a:outerShdw>
-              </a:effectLst>
+              <a:effectLst/>
               <a:latin typeface="Times New Roman" panose="02020603050405020304" charset="0"/>
               <a:cs typeface="Times New Roman" panose="02020603050405020304" charset="0"/>
             </a:endParaRPr>
@@ -3046,40 +3030,24 @@
             </a:pPr>
             <a:r>
               <a:rPr lang="en-US" sz="3200" b="1">
-                <a:ln/>
                 <a:solidFill>
                   <a:schemeClr val="accent1">
                     <a:lumMod val="75000"/>
                   </a:schemeClr>
                 </a:solidFill>
-                <a:effectLst>
-                  <a:outerShdw blurRad="38100" dist="25400" dir="5400000" algn="ctr" rotWithShape="0">
-                    <a:srgbClr val="6E747A">
-                      <a:alpha val="43000"/>
-                      <a:alpha val="43000"/>
-                    </a:srgbClr>
-                  </a:outerShdw>
-                </a:effectLst>
+                <a:effectLst/>
                 <a:latin typeface="Times New Roman" panose="02020603050405020304" charset="0"/>
                 <a:cs typeface="Times New Roman" panose="02020603050405020304" charset="0"/>
               </a:rPr>
               <a:t>KHOA CÔNG NGHỆ THÔNG TIN</a:t>
             </a:r>
             <a:endParaRPr lang="en-US" sz="3200" b="1">
-              <a:ln/>
               <a:solidFill>
                 <a:schemeClr val="accent1">
                   <a:lumMod val="75000"/>
                 </a:schemeClr>
               </a:solidFill>
-              <a:effectLst>
-                <a:outerShdw blurRad="38100" dist="25400" dir="5400000" algn="ctr" rotWithShape="0">
-                  <a:srgbClr val="6E747A">
-                    <a:alpha val="43000"/>
-                    <a:alpha val="43000"/>
-                  </a:srgbClr>
-                </a:outerShdw>
-              </a:effectLst>
+              <a:effectLst/>
               <a:latin typeface="Times New Roman" panose="02020603050405020304" charset="0"/>
               <a:cs typeface="Times New Roman" panose="02020603050405020304" charset="0"/>
             </a:endParaRPr>
@@ -3100,27 +3068,10 @@
           <a:prstGeom prst="roundRect">
             <a:avLst/>
           </a:prstGeom>
-          <a:solidFill>
-            <a:schemeClr val="accent3">
-              <a:lumMod val="20000"/>
-              <a:lumOff val="80000"/>
-            </a:schemeClr>
-          </a:solidFill>
-          <a:ln w="12700" cap="flat" cmpd="sng">
-            <a:solidFill>
-              <a:schemeClr val="bg2">
-                <a:lumMod val="50000"/>
-              </a:schemeClr>
-            </a:solidFill>
-            <a:prstDash val="solid"/>
-            <a:miter lim="800000"/>
-          </a:ln>
         </p:spPr>
         <p:style>
-          <a:lnRef idx="2">
-            <a:schemeClr val="accent1">
-              <a:lumMod val="75000"/>
-            </a:schemeClr>
+          <a:lnRef idx="0">
+            <a:srgbClr val="FFFFFF"/>
           </a:lnRef>
           <a:fillRef idx="1">
             <a:schemeClr val="accent1"/>
@@ -3139,7 +3090,7 @@
             <a:r>
               <a:rPr lang="en-US" sz="4400" cap="all">
                 <a:solidFill>
-                  <a:schemeClr val="tx1"/>
+                  <a:schemeClr val="bg1"/>
                 </a:solidFill>
                 <a:uFillTx/>
                 <a:latin typeface="Times New Roman" panose="02020603050405020304" charset="0"/>
@@ -3149,7 +3100,7 @@
             </a:r>
             <a:endParaRPr lang="en-US" sz="4400" cap="all">
               <a:solidFill>
-                <a:schemeClr val="tx1"/>
+                <a:schemeClr val="bg1"/>
               </a:solidFill>
               <a:uFillTx/>
               <a:latin typeface="Times New Roman" panose="02020603050405020304" charset="0"/>
@@ -3167,7 +3118,7 @@
         <p:spPr>
           <a:xfrm>
             <a:off x="604520" y="4145280"/>
-            <a:ext cx="2613025" cy="398780"/>
+            <a:ext cx="3139440" cy="460375"/>
           </a:xfrm>
           <a:prstGeom prst="rect">
             <a:avLst/>
@@ -3180,13 +3131,13 @@
           </a:bodyPr>
           <a:p>
             <a:r>
-              <a:rPr lang="en-US" sz="2000">
+              <a:rPr lang="en-US" sz="2400">
                 <a:latin typeface="Times New Roman" panose="02020603050405020304" charset="0"/>
                 <a:cs typeface="Times New Roman" panose="02020603050405020304" charset="0"/>
               </a:rPr>
               <a:t>Giảng viên hướng dẫn:</a:t>
             </a:r>
-            <a:endParaRPr lang="en-US" sz="2000">
+            <a:endParaRPr lang="en-US" sz="2400">
               <a:latin typeface="Times New Roman" panose="02020603050405020304" charset="0"/>
               <a:cs typeface="Times New Roman" panose="02020603050405020304" charset="0"/>
             </a:endParaRPr>
@@ -3202,7 +3153,7 @@
         <p:spPr>
           <a:xfrm>
             <a:off x="604520" y="4715510"/>
-            <a:ext cx="2613025" cy="398780"/>
+            <a:ext cx="3139440" cy="460375"/>
           </a:xfrm>
           <a:prstGeom prst="rect">
             <a:avLst/>
@@ -3215,13 +3166,13 @@
           </a:bodyPr>
           <a:p>
             <a:r>
-              <a:rPr lang="en-US" sz="2000">
+              <a:rPr lang="en-US" sz="2400">
                 <a:latin typeface="Times New Roman" panose="02020603050405020304" charset="0"/>
                 <a:cs typeface="Times New Roman" panose="02020603050405020304" charset="0"/>
               </a:rPr>
               <a:t>Sinh viên thực hiện:</a:t>
             </a:r>
-            <a:endParaRPr lang="en-US" sz="2000">
+            <a:endParaRPr lang="en-US" sz="2400">
               <a:latin typeface="Times New Roman" panose="02020603050405020304" charset="0"/>
               <a:cs typeface="Times New Roman" panose="02020603050405020304" charset="0"/>
             </a:endParaRPr>
@@ -3237,7 +3188,7 @@
         <p:spPr>
           <a:xfrm>
             <a:off x="604520" y="5285740"/>
-            <a:ext cx="2613025" cy="398780"/>
+            <a:ext cx="3139440" cy="460375"/>
           </a:xfrm>
           <a:prstGeom prst="rect">
             <a:avLst/>
@@ -3250,13 +3201,13 @@
           </a:bodyPr>
           <a:p>
             <a:r>
-              <a:rPr lang="en-US" sz="2000">
+              <a:rPr lang="en-US" sz="2400">
                 <a:latin typeface="Times New Roman" panose="02020603050405020304" charset="0"/>
                 <a:cs typeface="Times New Roman" panose="02020603050405020304" charset="0"/>
               </a:rPr>
               <a:t>Mã số sinh viên:</a:t>
             </a:r>
-            <a:endParaRPr lang="en-US" sz="2000">
+            <a:endParaRPr lang="en-US" sz="2400">
               <a:latin typeface="Times New Roman" panose="02020603050405020304" charset="0"/>
               <a:cs typeface="Times New Roman" panose="02020603050405020304" charset="0"/>
             </a:endParaRPr>
@@ -3271,8 +3222,8 @@
         </p:nvSpPr>
         <p:spPr>
           <a:xfrm>
-            <a:off x="3470275" y="4145280"/>
-            <a:ext cx="4064000" cy="398780"/>
+            <a:off x="4413885" y="4139565"/>
+            <a:ext cx="4064000" cy="460375"/>
           </a:xfrm>
           <a:prstGeom prst="rect">
             <a:avLst/>
@@ -3285,13 +3236,13 @@
           </a:bodyPr>
           <a:p>
             <a:r>
-              <a:rPr lang="en-US" sz="2000">
+              <a:rPr lang="en-US" sz="2400">
                 <a:latin typeface="Times New Roman" panose="02020603050405020304" charset="0"/>
                 <a:cs typeface="Times New Roman" panose="02020603050405020304" charset="0"/>
               </a:rPr>
               <a:t>TRẦN VŨ HOÀNG ƯNG</a:t>
             </a:r>
-            <a:endParaRPr lang="en-US" sz="2000">
+            <a:endParaRPr lang="en-US" sz="2400">
               <a:latin typeface="Times New Roman" panose="02020603050405020304" charset="0"/>
               <a:cs typeface="Times New Roman" panose="02020603050405020304" charset="0"/>
             </a:endParaRPr>
@@ -3306,8 +3257,8 @@
         </p:nvSpPr>
         <p:spPr>
           <a:xfrm>
-            <a:off x="3470275" y="4715510"/>
-            <a:ext cx="4064000" cy="398780"/>
+            <a:off x="4413885" y="4709795"/>
+            <a:ext cx="4064000" cy="460375"/>
           </a:xfrm>
           <a:prstGeom prst="rect">
             <a:avLst/>
@@ -3320,13 +3271,13 @@
           </a:bodyPr>
           <a:p>
             <a:r>
-              <a:rPr lang="en-US" sz="2000">
+              <a:rPr lang="en-US" sz="2400">
                 <a:latin typeface="Times New Roman" panose="02020603050405020304" charset="0"/>
                 <a:cs typeface="Times New Roman" panose="02020603050405020304" charset="0"/>
               </a:rPr>
               <a:t>VÕ MINH THUẬN</a:t>
             </a:r>
-            <a:endParaRPr lang="en-US" sz="2000">
+            <a:endParaRPr lang="en-US" sz="2400">
               <a:latin typeface="Times New Roman" panose="02020603050405020304" charset="0"/>
               <a:cs typeface="Times New Roman" panose="02020603050405020304" charset="0"/>
             </a:endParaRPr>
@@ -3335,77 +3286,14 @@
       </p:sp>
       <p:sp>
         <p:nvSpPr>
-          <p:cNvPr id="17" name="Freeform 2"/>
-          <p:cNvSpPr/>
-          <p:nvPr/>
-        </p:nvSpPr>
-        <p:spPr>
-          <a:xfrm>
-            <a:off x="5653405" y="1951355"/>
-            <a:ext cx="12322810" cy="10460990"/>
-          </a:xfrm>
-          <a:custGeom>
-            <a:avLst/>
-            <a:gdLst/>
-            <a:ahLst/>
-            <a:cxnLst/>
-            <a:rect l="l" t="t" r="r" b="b"/>
-            <a:pathLst>
-              <a:path w="11810023" h="10461246">
-                <a:moveTo>
-                  <a:pt x="0" y="0"/>
-                </a:moveTo>
-                <a:lnTo>
-                  <a:pt x="11810023" y="0"/>
-                </a:lnTo>
-                <a:lnTo>
-                  <a:pt x="11810023" y="10461246"/>
-                </a:lnTo>
-                <a:lnTo>
-                  <a:pt x="0" y="10461246"/>
-                </a:lnTo>
-                <a:lnTo>
-                  <a:pt x="0" y="0"/>
-                </a:lnTo>
-                <a:close/>
-              </a:path>
-            </a:pathLst>
-          </a:custGeom>
-          <a:blipFill>
-            <a:blip r:embed="rId2">
-              <a:extLst>
-                <a:ext uri="{96DAC541-7B7A-43D3-8B79-37D633B846F1}">
-                  <asvg:svgBlip xmlns:asvg="http://schemas.microsoft.com/office/drawing/2016/SVG/main" r:embed="rId3"/>
-                </a:ext>
-              </a:extLst>
-            </a:blip>
-            <a:stretch>
-              <a:fillRect/>
-            </a:stretch>
-          </a:blipFill>
-          <a:ln cap="sq">
-            <a:noFill/>
-            <a:prstDash val="solid"/>
-            <a:miter/>
-          </a:ln>
-        </p:spPr>
-        <p:txBody>
-          <a:bodyPr/>
-          <a:p>
-            <a:endParaRPr lang="en-US"/>
-          </a:p>
-        </p:txBody>
-      </p:sp>
-      <p:sp>
-        <p:nvSpPr>
           <p:cNvPr id="15" name="Text Box 14"/>
           <p:cNvSpPr txBox="1"/>
           <p:nvPr/>
         </p:nvSpPr>
         <p:spPr>
           <a:xfrm>
-            <a:off x="3470275" y="5291455"/>
-            <a:ext cx="4064000" cy="398780"/>
+            <a:off x="4413885" y="5285740"/>
+            <a:ext cx="4064000" cy="460375"/>
           </a:xfrm>
           <a:prstGeom prst="rect">
             <a:avLst/>
@@ -3418,13 +3306,13 @@
           </a:bodyPr>
           <a:p>
             <a:r>
-              <a:rPr lang="en-US" sz="2000">
+              <a:rPr lang="en-US" sz="2400">
                 <a:latin typeface="Times New Roman" panose="02020603050405020304" charset="0"/>
                 <a:cs typeface="Times New Roman" panose="02020603050405020304" charset="0"/>
               </a:rPr>
               <a:t>DH52108656</a:t>
             </a:r>
-            <a:endParaRPr lang="en-US" sz="2000">
+            <a:endParaRPr lang="en-US" sz="2400">
               <a:latin typeface="Times New Roman" panose="02020603050405020304" charset="0"/>
               <a:cs typeface="Times New Roman" panose="02020603050405020304" charset="0"/>
             </a:endParaRPr>
@@ -3594,7 +3482,7 @@
             <a:pPr algn="ctr"/>
             <a:r>
               <a:rPr lang="en-US"/>
-              <a:t>Tích hợp thêm chức năng check-in và chống bot</a:t>
+              <a:t>Tích hợp thêm gợi ý thông minh và chống bot</a:t>
             </a:r>
             <a:endParaRPr lang="en-US"/>
           </a:p>
@@ -3618,6 +3506,35 @@
         <p:nvPr/>
       </p:nvGrpSpPr>
       <p:grpSpPr/>
+      <p:sp>
+        <p:nvSpPr>
+          <p:cNvPr id="2" name="Text Box 1"/>
+          <p:cNvSpPr txBox="1"/>
+          <p:nvPr/>
+        </p:nvSpPr>
+        <p:spPr>
+          <a:xfrm>
+            <a:off x="2812415" y="3310890"/>
+            <a:ext cx="4064000" cy="368300"/>
+          </a:xfrm>
+          <a:prstGeom prst="rect">
+            <a:avLst/>
+          </a:prstGeom>
+          <a:noFill/>
+        </p:spPr>
+        <p:txBody>
+          <a:bodyPr wrap="square" rtlCol="0">
+            <a:spAutoFit/>
+          </a:bodyPr>
+          <a:p>
+            <a:r>
+              <a:rPr lang="en-US"/>
+              <a:t>Cảm ơn</a:t>
+            </a:r>
+            <a:endParaRPr lang="en-US"/>
+          </a:p>
+        </p:txBody>
+      </p:sp>
     </p:spTree>
   </p:cSld>
   <p:clrMapOvr>
@@ -3646,14 +3563,14 @@
       <p:grpSpPr/>
       <p:sp>
         <p:nvSpPr>
-          <p:cNvPr id="9" name="Freeform 3"/>
+          <p:cNvPr id="16" name="Freeform 9"/>
           <p:cNvSpPr/>
           <p:nvPr/>
         </p:nvSpPr>
         <p:spPr>
           <a:xfrm>
-            <a:off x="-5628800" y="3890419"/>
-            <a:ext cx="10663314" cy="2296259"/>
+            <a:off x="554355" y="34290"/>
+            <a:ext cx="4566285" cy="4020185"/>
           </a:xfrm>
           <a:custGeom>
             <a:avLst/>
@@ -3662,410 +3579,18 @@
             <a:cxnLst/>
             <a:rect l="l" t="t" r="r" b="b"/>
             <a:pathLst>
-              <a:path w="10663314" h="2296259">
+              <a:path w="2827361" h="2368013">
                 <a:moveTo>
                   <a:pt x="0" y="0"/>
                 </a:moveTo>
                 <a:lnTo>
-                  <a:pt x="10663314" y="0"/>
+                  <a:pt x="2827360" y="0"/>
                 </a:lnTo>
                 <a:lnTo>
-                  <a:pt x="10663314" y="2296259"/>
+                  <a:pt x="2827360" y="2368013"/>
                 </a:lnTo>
                 <a:lnTo>
-                  <a:pt x="0" y="2296259"/>
-                </a:lnTo>
-                <a:lnTo>
-                  <a:pt x="0" y="0"/>
-                </a:lnTo>
-                <a:close/>
-              </a:path>
-            </a:pathLst>
-          </a:custGeom>
-          <a:blipFill>
-            <a:blip r:embed="rId1">
-              <a:alphaModFix amt="16000"/>
-              <a:extLst>
-                <a:ext uri="{96DAC541-7B7A-43D3-8B79-37D633B846F1}">
-                  <asvg:svgBlip xmlns:asvg="http://schemas.microsoft.com/office/drawing/2016/SVG/main" r:embed="rId2"/>
-                </a:ext>
-              </a:extLst>
-            </a:blip>
-            <a:stretch>
-              <a:fillRect/>
-            </a:stretch>
-          </a:blipFill>
-        </p:spPr>
-      </p:sp>
-      <p:sp>
-        <p:nvSpPr>
-          <p:cNvPr id="3" name="Freeform 3"/>
-          <p:cNvSpPr/>
-          <p:nvPr/>
-        </p:nvSpPr>
-        <p:spPr>
-          <a:xfrm>
-            <a:off x="7193120" y="338229"/>
-            <a:ext cx="10663314" cy="2296259"/>
-          </a:xfrm>
-          <a:custGeom>
-            <a:avLst/>
-            <a:gdLst/>
-            <a:ahLst/>
-            <a:cxnLst/>
-            <a:rect l="l" t="t" r="r" b="b"/>
-            <a:pathLst>
-              <a:path w="10663314" h="2296259">
-                <a:moveTo>
-                  <a:pt x="0" y="0"/>
-                </a:moveTo>
-                <a:lnTo>
-                  <a:pt x="10663314" y="0"/>
-                </a:lnTo>
-                <a:lnTo>
-                  <a:pt x="10663314" y="2296259"/>
-                </a:lnTo>
-                <a:lnTo>
-                  <a:pt x="0" y="2296259"/>
-                </a:lnTo>
-                <a:lnTo>
-                  <a:pt x="0" y="0"/>
-                </a:lnTo>
-                <a:close/>
-              </a:path>
-            </a:pathLst>
-          </a:custGeom>
-          <a:blipFill>
-            <a:blip r:embed="rId1">
-              <a:alphaModFix amt="16000"/>
-              <a:extLst>
-                <a:ext uri="{96DAC541-7B7A-43D3-8B79-37D633B846F1}">
-                  <asvg:svgBlip xmlns:asvg="http://schemas.microsoft.com/office/drawing/2016/SVG/main" r:embed="rId2"/>
-                </a:ext>
-              </a:extLst>
-            </a:blip>
-            <a:stretch>
-              <a:fillRect/>
-            </a:stretch>
-          </a:blipFill>
-        </p:spPr>
-      </p:sp>
-      <p:sp>
-        <p:nvSpPr>
-          <p:cNvPr id="2" name="Flowchart: Alternate Process 1"/>
-          <p:cNvSpPr/>
-          <p:nvPr/>
-        </p:nvSpPr>
-        <p:spPr>
-          <a:xfrm>
-            <a:off x="2508885" y="338455"/>
-            <a:ext cx="7174230" cy="1266825"/>
-          </a:xfrm>
-          <a:prstGeom prst="flowChartAlternateProcess">
-            <a:avLst/>
-          </a:prstGeom>
-          <a:solidFill>
-            <a:schemeClr val="bg1">
-              <a:lumMod val="85000"/>
-            </a:schemeClr>
-          </a:solidFill>
-          <a:ln>
-            <a:solidFill>
-              <a:schemeClr val="bg1">
-                <a:lumMod val="65000"/>
-              </a:schemeClr>
-            </a:solidFill>
-          </a:ln>
-        </p:spPr>
-        <p:style>
-          <a:lnRef idx="2">
-            <a:schemeClr val="accent1">
-              <a:lumMod val="75000"/>
-            </a:schemeClr>
-          </a:lnRef>
-          <a:fillRef idx="1">
-            <a:schemeClr val="accent1"/>
-          </a:fillRef>
-          <a:effectRef idx="0">
-            <a:srgbClr val="FFFFFF"/>
-          </a:effectRef>
-          <a:fontRef idx="minor">
-            <a:schemeClr val="lt1"/>
-          </a:fontRef>
-        </p:style>
-        <p:txBody>
-          <a:bodyPr rtlCol="0" anchor="ctr"/>
-          <a:p>
-            <a:pPr algn="l"/>
-            <a:r>
-              <a:rPr lang="en-US" sz="3600">
-                <a:solidFill>
-                  <a:schemeClr val="tx1"/>
-                </a:solidFill>
-                <a:latin typeface="Times New Roman" panose="02020603050405020304" charset="0"/>
-                <a:cs typeface="Times New Roman" panose="02020603050405020304" charset="0"/>
-              </a:rPr>
-              <a:t>1.  Lý do chọn đề tài</a:t>
-            </a:r>
-            <a:endParaRPr lang="en-US" sz="3600">
-              <a:solidFill>
-                <a:schemeClr val="tx1"/>
-              </a:solidFill>
-              <a:latin typeface="Times New Roman" panose="02020603050405020304" charset="0"/>
-              <a:cs typeface="Times New Roman" panose="02020603050405020304" charset="0"/>
-            </a:endParaRPr>
-          </a:p>
-        </p:txBody>
-      </p:sp>
-      <p:sp>
-        <p:nvSpPr>
-          <p:cNvPr id="6" name="Flowchart: Alternate Process 5"/>
-          <p:cNvSpPr/>
-          <p:nvPr/>
-        </p:nvSpPr>
-        <p:spPr>
-          <a:xfrm>
-            <a:off x="2508885" y="2001520"/>
-            <a:ext cx="7174230" cy="1266825"/>
-          </a:xfrm>
-          <a:prstGeom prst="flowChartAlternateProcess">
-            <a:avLst/>
-          </a:prstGeom>
-          <a:solidFill>
-            <a:schemeClr val="bg1">
-              <a:lumMod val="85000"/>
-            </a:schemeClr>
-          </a:solidFill>
-          <a:ln>
-            <a:solidFill>
-              <a:schemeClr val="bg1">
-                <a:lumMod val="65000"/>
-              </a:schemeClr>
-            </a:solidFill>
-          </a:ln>
-        </p:spPr>
-        <p:style>
-          <a:lnRef idx="2">
-            <a:schemeClr val="accent1">
-              <a:lumMod val="75000"/>
-            </a:schemeClr>
-          </a:lnRef>
-          <a:fillRef idx="1">
-            <a:schemeClr val="accent1"/>
-          </a:fillRef>
-          <a:effectRef idx="0">
-            <a:srgbClr val="FFFFFF"/>
-          </a:effectRef>
-          <a:fontRef idx="minor">
-            <a:schemeClr val="lt1"/>
-          </a:fontRef>
-        </p:style>
-        <p:txBody>
-          <a:bodyPr rtlCol="0" anchor="ctr"/>
-          <a:p>
-            <a:pPr algn="l"/>
-            <a:r>
-              <a:rPr lang="en-US" sz="3600">
-                <a:solidFill>
-                  <a:schemeClr val="tx1"/>
-                </a:solidFill>
-                <a:latin typeface="Times New Roman" panose="02020603050405020304" charset="0"/>
-                <a:cs typeface="Times New Roman" panose="02020603050405020304" charset="0"/>
-              </a:rPr>
-              <a:t>2. Công nghệ sử dụng</a:t>
-            </a:r>
-            <a:endParaRPr lang="en-US" sz="3600">
-              <a:solidFill>
-                <a:schemeClr val="tx1"/>
-              </a:solidFill>
-              <a:latin typeface="Times New Roman" panose="02020603050405020304" charset="0"/>
-              <a:cs typeface="Times New Roman" panose="02020603050405020304" charset="0"/>
-            </a:endParaRPr>
-          </a:p>
-        </p:txBody>
-      </p:sp>
-      <p:sp>
-        <p:nvSpPr>
-          <p:cNvPr id="7" name="Flowchart: Alternate Process 6"/>
-          <p:cNvSpPr/>
-          <p:nvPr/>
-        </p:nvSpPr>
-        <p:spPr>
-          <a:xfrm>
-            <a:off x="2508885" y="3664585"/>
-            <a:ext cx="7174230" cy="1266825"/>
-          </a:xfrm>
-          <a:prstGeom prst="flowChartAlternateProcess">
-            <a:avLst/>
-          </a:prstGeom>
-          <a:solidFill>
-            <a:schemeClr val="bg1">
-              <a:lumMod val="85000"/>
-            </a:schemeClr>
-          </a:solidFill>
-          <a:ln>
-            <a:solidFill>
-              <a:schemeClr val="bg1">
-                <a:lumMod val="65000"/>
-              </a:schemeClr>
-            </a:solidFill>
-          </a:ln>
-        </p:spPr>
-        <p:style>
-          <a:lnRef idx="2">
-            <a:schemeClr val="accent1">
-              <a:lumMod val="75000"/>
-            </a:schemeClr>
-          </a:lnRef>
-          <a:fillRef idx="1">
-            <a:schemeClr val="accent1"/>
-          </a:fillRef>
-          <a:effectRef idx="0">
-            <a:srgbClr val="FFFFFF"/>
-          </a:effectRef>
-          <a:fontRef idx="minor">
-            <a:schemeClr val="lt1"/>
-          </a:fontRef>
-        </p:style>
-        <p:txBody>
-          <a:bodyPr rtlCol="0" anchor="ctr"/>
-          <a:p>
-            <a:pPr algn="l"/>
-            <a:r>
-              <a:rPr lang="en-US" sz="3600">
-                <a:solidFill>
-                  <a:schemeClr val="tx1"/>
-                </a:solidFill>
-                <a:latin typeface="Times New Roman" panose="02020603050405020304" charset="0"/>
-                <a:cs typeface="Times New Roman" panose="02020603050405020304" charset="0"/>
-              </a:rPr>
-              <a:t>3. Phân tích và thiết kế</a:t>
-            </a:r>
-            <a:endParaRPr lang="en-US" sz="3600">
-              <a:solidFill>
-                <a:schemeClr val="tx1"/>
-              </a:solidFill>
-              <a:latin typeface="Times New Roman" panose="02020603050405020304" charset="0"/>
-              <a:cs typeface="Times New Roman" panose="02020603050405020304" charset="0"/>
-            </a:endParaRPr>
-          </a:p>
-        </p:txBody>
-      </p:sp>
-      <p:sp>
-        <p:nvSpPr>
-          <p:cNvPr id="8" name="Flowchart: Alternate Process 7"/>
-          <p:cNvSpPr/>
-          <p:nvPr/>
-        </p:nvSpPr>
-        <p:spPr>
-          <a:xfrm>
-            <a:off x="2508885" y="5327650"/>
-            <a:ext cx="7174230" cy="1266825"/>
-          </a:xfrm>
-          <a:prstGeom prst="flowChartAlternateProcess">
-            <a:avLst/>
-          </a:prstGeom>
-          <a:solidFill>
-            <a:schemeClr val="bg1">
-              <a:lumMod val="85000"/>
-            </a:schemeClr>
-          </a:solidFill>
-          <a:ln>
-            <a:solidFill>
-              <a:schemeClr val="bg1">
-                <a:lumMod val="65000"/>
-              </a:schemeClr>
-            </a:solidFill>
-          </a:ln>
-        </p:spPr>
-        <p:style>
-          <a:lnRef idx="2">
-            <a:schemeClr val="accent1">
-              <a:lumMod val="75000"/>
-            </a:schemeClr>
-          </a:lnRef>
-          <a:fillRef idx="1">
-            <a:schemeClr val="accent1"/>
-          </a:fillRef>
-          <a:effectRef idx="0">
-            <a:srgbClr val="FFFFFF"/>
-          </a:effectRef>
-          <a:fontRef idx="minor">
-            <a:schemeClr val="lt1"/>
-          </a:fontRef>
-        </p:style>
-        <p:txBody>
-          <a:bodyPr rtlCol="0" anchor="ctr"/>
-          <a:p>
-            <a:pPr algn="l"/>
-            <a:r>
-              <a:rPr lang="en-US" sz="3600">
-                <a:solidFill>
-                  <a:schemeClr val="tx1"/>
-                </a:solidFill>
-                <a:latin typeface="Times New Roman" panose="02020603050405020304" charset="0"/>
-                <a:cs typeface="Times New Roman" panose="02020603050405020304" charset="0"/>
-              </a:rPr>
-              <a:t>4. Kết quả và hướng phát triển</a:t>
-            </a:r>
-            <a:endParaRPr lang="en-US" sz="3600">
-              <a:solidFill>
-                <a:schemeClr val="tx1"/>
-              </a:solidFill>
-              <a:latin typeface="Times New Roman" panose="02020603050405020304" charset="0"/>
-              <a:cs typeface="Times New Roman" panose="02020603050405020304" charset="0"/>
-            </a:endParaRPr>
-          </a:p>
-        </p:txBody>
-      </p:sp>
-    </p:spTree>
-  </p:cSld>
-  <p:clrMapOvr>
-    <a:masterClrMapping/>
-  </p:clrMapOvr>
-</p:sld>
-</file>
-
-<file path=ppt/slides/slide3.xml><?xml version="1.0" encoding="utf-8"?>
-<p:sld xmlns:a="http://schemas.openxmlformats.org/drawingml/2006/main" xmlns:r="http://schemas.openxmlformats.org/officeDocument/2006/relationships" xmlns:p="http://schemas.openxmlformats.org/presentationml/2006/main">
-  <p:cSld>
-    <p:spTree>
-      <p:nvGrpSpPr>
-        <p:cNvPr id="1" name=""/>
-        <p:cNvGrpSpPr/>
-        <p:nvPr/>
-      </p:nvGrpSpPr>
-      <p:grpSpPr/>
-      <p:sp>
-        <p:nvSpPr>
-          <p:cNvPr id="20" name="Freeform 2"/>
-          <p:cNvSpPr/>
-          <p:nvPr/>
-        </p:nvSpPr>
-        <p:spPr>
-          <a:xfrm rot="10800000">
-            <a:off x="-5892800" y="-2558415"/>
-            <a:ext cx="12322810" cy="10460990"/>
-          </a:xfrm>
-          <a:custGeom>
-            <a:avLst/>
-            <a:gdLst/>
-            <a:ahLst/>
-            <a:cxnLst/>
-            <a:rect l="l" t="t" r="r" b="b"/>
-            <a:pathLst>
-              <a:path w="11810023" h="10461246">
-                <a:moveTo>
-                  <a:pt x="0" y="0"/>
-                </a:moveTo>
-                <a:lnTo>
-                  <a:pt x="11810023" y="0"/>
-                </a:lnTo>
-                <a:lnTo>
-                  <a:pt x="11810023" y="10461246"/>
-                </a:lnTo>
-                <a:lnTo>
-                  <a:pt x="0" y="10461246"/>
+                  <a:pt x="0" y="2368013"/>
                 </a:lnTo>
                 <a:lnTo>
                   <a:pt x="0" y="0"/>
@@ -4086,13 +3611,307 @@
               <a:fillRect/>
             </a:stretch>
           </a:blipFill>
-          <a:ln cap="sq">
-            <a:noFill/>
-            <a:prstDash val="solid"/>
-            <a:miter/>
-          </a:ln>
-        </p:spPr>
-      </p:sp>
+        </p:spPr>
+      </p:sp>
+      <p:sp>
+        <p:nvSpPr>
+          <p:cNvPr id="11" name="Title 10"/>
+          <p:cNvSpPr>
+            <a:spLocks noGrp="1"/>
+          </p:cNvSpPr>
+          <p:nvPr>
+            <p:ph type="title"/>
+          </p:nvPr>
+        </p:nvSpPr>
+        <p:spPr/>
+        <p:txBody>
+          <a:bodyPr/>
+          <a:p>
+            <a:pPr algn="ctr"/>
+            <a:r>
+              <a:rPr lang="en-US" b="1">
+                <a:solidFill>
+                  <a:schemeClr val="accent1"/>
+                </a:solidFill>
+                <a:effectLst>
+                  <a:outerShdw blurRad="38100" dist="38100" dir="2700000" algn="tl">
+                    <a:srgbClr val="000000">
+                      <a:alpha val="43137"/>
+                    </a:srgbClr>
+                  </a:outerShdw>
+                </a:effectLst>
+                <a:latin typeface="Times New Roman" panose="02020603050405020304" charset="0"/>
+                <a:cs typeface="Times New Roman" panose="02020603050405020304" charset="0"/>
+              </a:rPr>
+              <a:t>NỘI DUNG</a:t>
+            </a:r>
+            <a:endParaRPr lang="en-US" b="1">
+              <a:solidFill>
+                <a:schemeClr val="accent1"/>
+              </a:solidFill>
+              <a:effectLst>
+                <a:outerShdw blurRad="38100" dist="38100" dir="2700000" algn="tl">
+                  <a:srgbClr val="000000">
+                    <a:alpha val="43137"/>
+                  </a:srgbClr>
+                </a:outerShdw>
+              </a:effectLst>
+              <a:latin typeface="Times New Roman" panose="02020603050405020304" charset="0"/>
+              <a:cs typeface="Times New Roman" panose="02020603050405020304" charset="0"/>
+            </a:endParaRPr>
+          </a:p>
+        </p:txBody>
+      </p:sp>
+      <p:sp>
+        <p:nvSpPr>
+          <p:cNvPr id="12" name="Rounded Rectangle 11"/>
+          <p:cNvSpPr/>
+          <p:nvPr/>
+        </p:nvSpPr>
+        <p:spPr>
+          <a:xfrm>
+            <a:off x="1759585" y="1691005"/>
+            <a:ext cx="8472805" cy="1035050"/>
+          </a:xfrm>
+          <a:prstGeom prst="roundRect">
+            <a:avLst/>
+          </a:prstGeom>
+        </p:spPr>
+        <p:style>
+          <a:lnRef idx="2">
+            <a:schemeClr val="accent1">
+              <a:lumMod val="75000"/>
+            </a:schemeClr>
+          </a:lnRef>
+          <a:fillRef idx="1">
+            <a:schemeClr val="accent1"/>
+          </a:fillRef>
+          <a:effectRef idx="0">
+            <a:srgbClr val="FFFFFF"/>
+          </a:effectRef>
+          <a:fontRef idx="minor">
+            <a:schemeClr val="lt1"/>
+          </a:fontRef>
+        </p:style>
+        <p:txBody>
+          <a:bodyPr rtlCol="0" anchor="ctr"/>
+          <a:p>
+            <a:pPr algn="ctr"/>
+            <a:r>
+              <a:rPr lang="en-US"/>
+              <a:t>1. Mục tiêu của đề tài</a:t>
+            </a:r>
+            <a:endParaRPr lang="en-US"/>
+          </a:p>
+        </p:txBody>
+      </p:sp>
+      <p:sp>
+        <p:nvSpPr>
+          <p:cNvPr id="17" name="Freeform 4"/>
+          <p:cNvSpPr/>
+          <p:nvPr/>
+        </p:nvSpPr>
+        <p:spPr>
+          <a:xfrm>
+            <a:off x="9724738" y="3428912"/>
+            <a:ext cx="1959026" cy="3145519"/>
+          </a:xfrm>
+          <a:custGeom>
+            <a:avLst/>
+            <a:gdLst/>
+            <a:ahLst/>
+            <a:cxnLst/>
+            <a:rect l="l" t="t" r="r" b="b"/>
+            <a:pathLst>
+              <a:path w="1959026" h="3145519">
+                <a:moveTo>
+                  <a:pt x="0" y="0"/>
+                </a:moveTo>
+                <a:lnTo>
+                  <a:pt x="1959026" y="0"/>
+                </a:lnTo>
+                <a:lnTo>
+                  <a:pt x="1959026" y="3145520"/>
+                </a:lnTo>
+                <a:lnTo>
+                  <a:pt x="0" y="3145520"/>
+                </a:lnTo>
+                <a:lnTo>
+                  <a:pt x="0" y="0"/>
+                </a:lnTo>
+                <a:close/>
+              </a:path>
+            </a:pathLst>
+          </a:custGeom>
+          <a:blipFill>
+            <a:blip r:embed="rId3">
+              <a:extLst>
+                <a:ext uri="{96DAC541-7B7A-43D3-8B79-37D633B846F1}">
+                  <asvg:svgBlip xmlns:asvg="http://schemas.microsoft.com/office/drawing/2016/SVG/main" r:embed="rId4"/>
+                </a:ext>
+              </a:extLst>
+            </a:blip>
+            <a:stretch>
+              <a:fillRect/>
+            </a:stretch>
+          </a:blipFill>
+        </p:spPr>
+      </p:sp>
+      <p:sp>
+        <p:nvSpPr>
+          <p:cNvPr id="13" name="Rounded Rectangle 12"/>
+          <p:cNvSpPr/>
+          <p:nvPr/>
+        </p:nvSpPr>
+        <p:spPr>
+          <a:xfrm>
+            <a:off x="1759585" y="3002280"/>
+            <a:ext cx="8472805" cy="1035050"/>
+          </a:xfrm>
+          <a:prstGeom prst="roundRect">
+            <a:avLst/>
+          </a:prstGeom>
+        </p:spPr>
+        <p:style>
+          <a:lnRef idx="2">
+            <a:schemeClr val="accent1">
+              <a:lumMod val="75000"/>
+            </a:schemeClr>
+          </a:lnRef>
+          <a:fillRef idx="1">
+            <a:schemeClr val="accent1"/>
+          </a:fillRef>
+          <a:effectRef idx="0">
+            <a:srgbClr val="FFFFFF"/>
+          </a:effectRef>
+          <a:fontRef idx="minor">
+            <a:schemeClr val="lt1"/>
+          </a:fontRef>
+        </p:style>
+        <p:txBody>
+          <a:bodyPr rtlCol="0" anchor="ctr"/>
+          <a:p>
+            <a:pPr algn="ctr"/>
+            <a:r>
+              <a:rPr lang="en-US"/>
+              <a:t>2. Công nghệ sử dụng</a:t>
+            </a:r>
+            <a:endParaRPr lang="en-US"/>
+          </a:p>
+        </p:txBody>
+      </p:sp>
+      <p:sp>
+        <p:nvSpPr>
+          <p:cNvPr id="14" name="Rounded Rectangle 13"/>
+          <p:cNvSpPr/>
+          <p:nvPr/>
+        </p:nvSpPr>
+        <p:spPr>
+          <a:xfrm>
+            <a:off x="1759585" y="4313555"/>
+            <a:ext cx="8472805" cy="1035050"/>
+          </a:xfrm>
+          <a:prstGeom prst="roundRect">
+            <a:avLst/>
+          </a:prstGeom>
+        </p:spPr>
+        <p:style>
+          <a:lnRef idx="2">
+            <a:schemeClr val="accent1">
+              <a:lumMod val="75000"/>
+            </a:schemeClr>
+          </a:lnRef>
+          <a:fillRef idx="1">
+            <a:schemeClr val="accent1"/>
+          </a:fillRef>
+          <a:effectRef idx="0">
+            <a:srgbClr val="FFFFFF"/>
+          </a:effectRef>
+          <a:fontRef idx="minor">
+            <a:schemeClr val="lt1"/>
+          </a:fontRef>
+        </p:style>
+        <p:txBody>
+          <a:bodyPr rtlCol="0" anchor="ctr"/>
+          <a:p>
+            <a:pPr algn="ctr"/>
+            <a:r>
+              <a:rPr lang="en-US"/>
+              <a:t>3. Phân tích và thiết kế</a:t>
+            </a:r>
+            <a:endParaRPr lang="en-US"/>
+          </a:p>
+        </p:txBody>
+      </p:sp>
+      <p:sp>
+        <p:nvSpPr>
+          <p:cNvPr id="15" name="Rounded Rectangle 14"/>
+          <p:cNvSpPr/>
+          <p:nvPr/>
+        </p:nvSpPr>
+        <p:spPr>
+          <a:xfrm>
+            <a:off x="1759585" y="5624830"/>
+            <a:ext cx="8472805" cy="1035050"/>
+          </a:xfrm>
+          <a:prstGeom prst="roundRect">
+            <a:avLst/>
+          </a:prstGeom>
+        </p:spPr>
+        <p:style>
+          <a:lnRef idx="2">
+            <a:schemeClr val="accent1">
+              <a:lumMod val="75000"/>
+            </a:schemeClr>
+          </a:lnRef>
+          <a:fillRef idx="1">
+            <a:schemeClr val="accent1"/>
+          </a:fillRef>
+          <a:effectRef idx="0">
+            <a:srgbClr val="FFFFFF"/>
+          </a:effectRef>
+          <a:fontRef idx="minor">
+            <a:schemeClr val="lt1"/>
+          </a:fontRef>
+        </p:style>
+        <p:txBody>
+          <a:bodyPr rtlCol="0" anchor="ctr"/>
+          <a:p>
+            <a:pPr algn="ctr"/>
+            <a:r>
+              <a:rPr lang="en-US"/>
+              <a:t>4. Kết luận và hướng phát triển</a:t>
+            </a:r>
+            <a:endParaRPr lang="en-US"/>
+          </a:p>
+        </p:txBody>
+      </p:sp>
+    </p:spTree>
+  </p:cSld>
+  <p:clrMapOvr>
+    <a:masterClrMapping/>
+  </p:clrMapOvr>
+  <mc:AlternateContent xmlns:mc="http://schemas.openxmlformats.org/markup-compatibility/2006">
+    <mc:Choice xmlns:p14="http://schemas.microsoft.com/office/powerpoint/2010/main" Requires="p14">
+      <p:transition spd="slow" p14:dur="2000"/>
+    </mc:Choice>
+    <mc:Fallback>
+      <p:transition spd="slow"/>
+    </mc:Fallback>
+  </mc:AlternateContent>
+</p:sld>
+</file>
+
+<file path=ppt/slides/slide3.xml><?xml version="1.0" encoding="utf-8"?>
+<p:sld xmlns:a="http://schemas.openxmlformats.org/drawingml/2006/main" xmlns:r="http://schemas.openxmlformats.org/officeDocument/2006/relationships" xmlns:p="http://schemas.openxmlformats.org/presentationml/2006/main">
+  <p:cSld>
+    <p:spTree>
+      <p:nvGrpSpPr>
+        <p:cNvPr id="1" name=""/>
+        <p:cNvGrpSpPr/>
+        <p:nvPr/>
+      </p:nvGrpSpPr>
+      <p:grpSpPr/>
       <p:sp>
         <p:nvSpPr>
           <p:cNvPr id="2" name="Title 1"/>
@@ -4107,11 +3926,38 @@
         <p:txBody>
           <a:bodyPr/>
           <a:p>
-            <a:r>
-              <a:rPr lang="en-US"/>
-              <a:t>Lý do chọn đề tài</a:t>
-            </a:r>
-            <a:endParaRPr lang="en-US"/>
+            <a:pPr algn="ctr"/>
+            <a:r>
+              <a:rPr lang="en-US" b="1">
+                <a:solidFill>
+                  <a:schemeClr val="accent1"/>
+                </a:solidFill>
+                <a:effectLst>
+                  <a:outerShdw blurRad="38100" dist="38100" dir="2700000" algn="tl">
+                    <a:srgbClr val="000000">
+                      <a:alpha val="43137"/>
+                    </a:srgbClr>
+                  </a:outerShdw>
+                </a:effectLst>
+                <a:latin typeface="Times New Roman" panose="02020603050405020304" charset="0"/>
+                <a:cs typeface="Times New Roman" panose="02020603050405020304" charset="0"/>
+              </a:rPr>
+              <a:t>MỤC TIÊU</a:t>
+            </a:r>
+            <a:endParaRPr lang="en-US" b="1">
+              <a:solidFill>
+                <a:schemeClr val="accent1"/>
+              </a:solidFill>
+              <a:effectLst>
+                <a:outerShdw blurRad="38100" dist="38100" dir="2700000" algn="tl">
+                  <a:srgbClr val="000000">
+                    <a:alpha val="43137"/>
+                  </a:srgbClr>
+                </a:outerShdw>
+              </a:effectLst>
+              <a:latin typeface="Times New Roman" panose="02020603050405020304" charset="0"/>
+              <a:cs typeface="Times New Roman" panose="02020603050405020304" charset="0"/>
+            </a:endParaRPr>
           </a:p>
         </p:txBody>
       </p:sp>
@@ -4144,83 +3990,13 @@
               <a:buChar char="•"/>
             </a:pPr>
             <a:r>
-              <a:rPr lang="en-US" altLang="en-US" sz="2000">
+              <a:rPr lang="en-US" altLang="en-US" sz="2400">
                 <a:latin typeface="Times New Roman" panose="02020603050405020304" charset="0"/>
                 <a:cs typeface="Times New Roman" panose="02020603050405020304" charset="0"/>
               </a:rPr>
-              <a:t>Các sự kiện v</a:t>
-            </a:r>
-            <a:r>
-              <a:rPr lang="en-US" altLang="en-US" sz="2000">
-                <a:latin typeface="Times New Roman" panose="02020603050405020304" charset="0"/>
-                <a:cs typeface="Times New Roman" panose="02020603050405020304" charset="0"/>
-              </a:rPr>
-              <a:t>ă</a:t>
-            </a:r>
-            <a:r>
-              <a:rPr lang="en-US" altLang="en-US" sz="2000">
-                <a:latin typeface="Times New Roman" panose="02020603050405020304" charset="0"/>
-                <a:cs typeface="Times New Roman" panose="02020603050405020304" charset="0"/>
-              </a:rPr>
-              <a:t>n hóa, giải trí nh</a:t>
-            </a:r>
-            <a:r>
-              <a:rPr lang="en-US" altLang="en-US" sz="2000">
-                <a:latin typeface="Times New Roman" panose="02020603050405020304" charset="0"/>
-                <a:cs typeface="Times New Roman" panose="02020603050405020304" charset="0"/>
-              </a:rPr>
-              <a:t>ư</a:t>
-            </a:r>
-            <a:r>
-              <a:rPr lang="en-US" altLang="en-US" sz="2000">
-                <a:latin typeface="Times New Roman" panose="02020603050405020304" charset="0"/>
-                <a:cs typeface="Times New Roman" panose="02020603050405020304" charset="0"/>
-              </a:rPr>
-              <a:t> concert, workshop, triển lãm, thể thao ngày càng phát triển và thu hút </a:t>
-            </a:r>
-            <a:r>
-              <a:rPr lang="en-US" altLang="en-US" sz="2000">
-                <a:latin typeface="Times New Roman" panose="02020603050405020304" charset="0"/>
-                <a:cs typeface="Times New Roman" panose="02020603050405020304" charset="0"/>
-              </a:rPr>
-              <a:t>đ</a:t>
-            </a:r>
-            <a:r>
-              <a:rPr lang="en-US" altLang="en-US" sz="2000">
-                <a:latin typeface="Times New Roman" panose="02020603050405020304" charset="0"/>
-                <a:cs typeface="Times New Roman" panose="02020603050405020304" charset="0"/>
-              </a:rPr>
-              <a:t>ông </a:t>
-            </a:r>
-            <a:r>
-              <a:rPr lang="en-US" altLang="en-US" sz="2000">
-                <a:latin typeface="Times New Roman" panose="02020603050405020304" charset="0"/>
-                <a:cs typeface="Times New Roman" panose="02020603050405020304" charset="0"/>
-              </a:rPr>
-              <a:t>đ</a:t>
-            </a:r>
-            <a:r>
-              <a:rPr lang="en-US" altLang="en-US" sz="2000">
-                <a:latin typeface="Times New Roman" panose="02020603050405020304" charset="0"/>
-                <a:cs typeface="Times New Roman" panose="02020603050405020304" charset="0"/>
-              </a:rPr>
-              <a:t>ảo ng</a:t>
-            </a:r>
-            <a:r>
-              <a:rPr lang="en-US" altLang="en-US" sz="2000">
-                <a:latin typeface="Times New Roman" panose="02020603050405020304" charset="0"/>
-                <a:cs typeface="Times New Roman" panose="02020603050405020304" charset="0"/>
-              </a:rPr>
-              <a:t>ư</a:t>
-            </a:r>
-            <a:r>
-              <a:rPr lang="en-US" altLang="en-US" sz="2000">
-                <a:latin typeface="Times New Roman" panose="02020603050405020304" charset="0"/>
-                <a:cs typeface="Times New Roman" panose="02020603050405020304" charset="0"/>
-              </a:rPr>
-              <a:t>ời tham gia.</a:t>
-            </a:r>
-            <a:endParaRPr lang="en-US" altLang="en-US" sz="2000">
+              <a:t>Cung cấp kênh mua vé trực tuyến nhanh chóng và tiện lợi.</a:t>
+            </a:r>
+            <a:endParaRPr lang="en-US" altLang="en-US" sz="2400">
               <a:latin typeface="Times New Roman" panose="02020603050405020304" charset="0"/>
               <a:cs typeface="Times New Roman" panose="02020603050405020304" charset="0"/>
             </a:endParaRPr>
@@ -4233,7 +4009,21 @@
               <a:buFont typeface="Arial" panose="020B0704020202020204" pitchFamily="34" charset="0"/>
               <a:buChar char="•"/>
             </a:pPr>
-            <a:endParaRPr lang="en-US" altLang="en-US" sz="2000">
+            <a:r>
+              <a:rPr lang="" altLang="en-US" sz="2400">
+                <a:latin typeface="Times New Roman" panose="02020603050405020304" charset="0"/>
+                <a:cs typeface="Times New Roman" panose="02020603050405020304" charset="0"/>
+              </a:rPr>
+              <a:t>Đ</a:t>
+            </a:r>
+            <a:r>
+              <a:rPr lang="en-US" altLang="en-US" sz="2400">
+                <a:latin typeface="Times New Roman" panose="02020603050405020304" charset="0"/>
+                <a:cs typeface="Times New Roman" panose="02020603050405020304" charset="0"/>
+              </a:rPr>
+              <a:t>ảm bảo tính minh bạch trong quá trình mua và thanh toán vé.</a:t>
+            </a:r>
+            <a:endParaRPr lang="en-US" altLang="en-US" sz="2400">
               <a:latin typeface="Times New Roman" panose="02020603050405020304" charset="0"/>
               <a:cs typeface="Times New Roman" panose="02020603050405020304" charset="0"/>
             </a:endParaRPr>
@@ -4247,97 +4037,13 @@
               <a:buChar char="•"/>
             </a:pPr>
             <a:r>
-              <a:rPr lang="en-US" altLang="en-US" sz="2000">
+              <a:rPr lang="en-US" altLang="en-US" sz="2400">
                 <a:latin typeface="Times New Roman" panose="02020603050405020304" charset="0"/>
                 <a:cs typeface="Times New Roman" panose="02020603050405020304" charset="0"/>
               </a:rPr>
-              <a:t>Hiện nay việc bán vé chủ yếu thông qua </a:t>
-            </a:r>
-            <a:r>
-              <a:rPr lang="en-US" altLang="en-US" sz="2000">
-                <a:latin typeface="Times New Roman" panose="02020603050405020304" charset="0"/>
-                <a:cs typeface="Times New Roman" panose="02020603050405020304" charset="0"/>
-              </a:rPr>
-              <a:t>đ</a:t>
-            </a:r>
-            <a:r>
-              <a:rPr lang="en-US" altLang="en-US" sz="2000">
-                <a:latin typeface="Times New Roman" panose="02020603050405020304" charset="0"/>
-                <a:cs typeface="Times New Roman" panose="02020603050405020304" charset="0"/>
-              </a:rPr>
-              <a:t>ại l</a:t>
-            </a:r>
-            <a:r>
-              <a:rPr lang="en-US" altLang="en-US" sz="2000">
-                <a:latin typeface="Times New Roman" panose="02020603050405020304" charset="0"/>
-                <a:cs typeface="Times New Roman" panose="02020603050405020304" charset="0"/>
-              </a:rPr>
-              <a:t>ý</a:t>
-            </a:r>
-            <a:r>
-              <a:rPr lang="en-US" altLang="en-US" sz="2000">
-                <a:latin typeface="Times New Roman" panose="02020603050405020304" charset="0"/>
-                <a:cs typeface="Times New Roman" panose="02020603050405020304" charset="0"/>
-              </a:rPr>
-              <a:t> hoặc mạng xã hội vẫn còn nhiều hạn chế nh</a:t>
-            </a:r>
-            <a:r>
-              <a:rPr lang="en-US" altLang="en-US" sz="2000">
-                <a:latin typeface="Times New Roman" panose="02020603050405020304" charset="0"/>
-                <a:cs typeface="Times New Roman" panose="02020603050405020304" charset="0"/>
-              </a:rPr>
-              <a:t>ư</a:t>
-            </a:r>
-            <a:r>
-              <a:rPr lang="en-US" altLang="en-US" sz="2000">
-                <a:latin typeface="Times New Roman" panose="02020603050405020304" charset="0"/>
-                <a:cs typeface="Times New Roman" panose="02020603050405020304" charset="0"/>
-              </a:rPr>
-              <a:t> khó quản l</a:t>
-            </a:r>
-            <a:r>
-              <a:rPr lang="en-US" altLang="en-US" sz="2000">
-                <a:latin typeface="Times New Roman" panose="02020603050405020304" charset="0"/>
-                <a:cs typeface="Times New Roman" panose="02020603050405020304" charset="0"/>
-              </a:rPr>
-              <a:t>ý</a:t>
-            </a:r>
-            <a:r>
-              <a:rPr lang="en-US" altLang="en-US" sz="2000">
-                <a:latin typeface="Times New Roman" panose="02020603050405020304" charset="0"/>
-                <a:cs typeface="Times New Roman" panose="02020603050405020304" charset="0"/>
-              </a:rPr>
-              <a:t>, thiếu minh bạch trong thanh toán và ch</a:t>
-            </a:r>
-            <a:r>
-              <a:rPr lang="en-US" altLang="en-US" sz="2000">
-                <a:latin typeface="Times New Roman" panose="02020603050405020304" charset="0"/>
-                <a:cs typeface="Times New Roman" panose="02020603050405020304" charset="0"/>
-              </a:rPr>
-              <a:t>ư</a:t>
-            </a:r>
-            <a:r>
-              <a:rPr lang="en-US" altLang="en-US" sz="2000">
-                <a:latin typeface="Times New Roman" panose="02020603050405020304" charset="0"/>
-                <a:cs typeface="Times New Roman" panose="02020603050405020304" charset="0"/>
-              </a:rPr>
-              <a:t>a mang lại trải nghiệm mua vé thuận tiện cho ng</a:t>
-            </a:r>
-            <a:r>
-              <a:rPr lang="en-US" altLang="en-US" sz="2000">
-                <a:latin typeface="Times New Roman" panose="02020603050405020304" charset="0"/>
-                <a:cs typeface="Times New Roman" panose="02020603050405020304" charset="0"/>
-              </a:rPr>
-              <a:t>ư</a:t>
-            </a:r>
-            <a:r>
-              <a:rPr lang="en-US" altLang="en-US" sz="2000">
-                <a:latin typeface="Times New Roman" panose="02020603050405020304" charset="0"/>
-                <a:cs typeface="Times New Roman" panose="02020603050405020304" charset="0"/>
-              </a:rPr>
-              <a:t>ời dùng.</a:t>
-            </a:r>
-            <a:endParaRPr lang="en-US" altLang="en-US" sz="2000">
+              <a:t>Tăng tính chính xác, giảm sai sót trong việc phát hành và kiểm soát vé</a:t>
+            </a:r>
+            <a:endParaRPr lang="en-US" altLang="en-US" sz="2400">
               <a:latin typeface="Times New Roman" panose="02020603050405020304" charset="0"/>
               <a:cs typeface="Times New Roman" panose="02020603050405020304" charset="0"/>
             </a:endParaRPr>
@@ -4350,55 +4056,42 @@
               <a:buFont typeface="Arial" panose="020B0704020202020204" pitchFamily="34" charset="0"/>
               <a:buChar char="•"/>
             </a:pPr>
-            <a:endParaRPr lang="en-US" altLang="en-US" sz="2000">
-              <a:latin typeface="Times New Roman" panose="02020603050405020304" charset="0"/>
-              <a:cs typeface="Times New Roman" panose="02020603050405020304" charset="0"/>
-            </a:endParaRPr>
-          </a:p>
-          <a:p>
-            <a:pPr marL="285750" indent="-285750" algn="just">
-              <a:lnSpc>
-                <a:spcPct val="150000"/>
-              </a:lnSpc>
-              <a:buFont typeface="Arial" panose="020B0704020202020204" pitchFamily="34" charset="0"/>
-              <a:buChar char="•"/>
-            </a:pPr>
-            <a:r>
-              <a:rPr lang="en-US" altLang="en-US" sz="2000">
+            <a:r>
+              <a:rPr lang="en-US" altLang="en-US" sz="2400">
                 <a:latin typeface="Times New Roman" panose="02020603050405020304" charset="0"/>
                 <a:cs typeface="Times New Roman" panose="02020603050405020304" charset="0"/>
               </a:rPr>
-              <a:t>Vì vậy, việc xây dựng một website bán vé sự kiện là cần thiết nhằm cung cấp nền tảng mua vé nhanh chóng, ổn </a:t>
-            </a:r>
-            <a:r>
-              <a:rPr lang="en-US" altLang="en-US" sz="2000">
+              <a:t>Hỗ trợ nhà tổ chức sự kiện quản l</a:t>
+            </a:r>
+            <a:r>
+              <a:rPr lang="" altLang="en-US" sz="2400">
+                <a:latin typeface="Times New Roman" panose="02020603050405020304" charset="0"/>
+                <a:cs typeface="Times New Roman" panose="02020603050405020304" charset="0"/>
+              </a:rPr>
+              <a:t>ý</a:t>
+            </a:r>
+            <a:r>
+              <a:rPr lang="en-US" altLang="en-US" sz="2400">
+                <a:latin typeface="Times New Roman" panose="02020603050405020304" charset="0"/>
+                <a:cs typeface="Times New Roman" panose="02020603050405020304" charset="0"/>
+              </a:rPr>
+              <a:t> vé và </a:t>
+            </a:r>
+            <a:r>
+              <a:rPr lang="" altLang="en-US" sz="2400">
                 <a:latin typeface="Times New Roman" panose="02020603050405020304" charset="0"/>
                 <a:cs typeface="Times New Roman" panose="02020603050405020304" charset="0"/>
               </a:rPr>
               <a:t>đ</a:t>
             </a:r>
             <a:r>
-              <a:rPr lang="en-US" altLang="en-US" sz="2000">
+              <a:rPr lang="en-US" altLang="en-US" sz="2400">
                 <a:latin typeface="Times New Roman" panose="02020603050405020304" charset="0"/>
                 <a:cs typeface="Times New Roman" panose="02020603050405020304" charset="0"/>
               </a:rPr>
-              <a:t>ịnh, minh bạch và hỗ trợ nhà tổ chức quản l</a:t>
-            </a:r>
-            <a:r>
-              <a:rPr lang="en-US" altLang="en-US" sz="2000">
-                <a:latin typeface="Times New Roman" panose="02020603050405020304" charset="0"/>
-                <a:cs typeface="Times New Roman" panose="02020603050405020304" charset="0"/>
-              </a:rPr>
-              <a:t>ý</a:t>
-            </a:r>
-            <a:r>
-              <a:rPr lang="en-US" altLang="en-US" sz="2000">
-                <a:latin typeface="Times New Roman" panose="02020603050405020304" charset="0"/>
-                <a:cs typeface="Times New Roman" panose="02020603050405020304" charset="0"/>
-              </a:rPr>
-              <a:t> vé, khách tham dự hiệu quả hơn.</a:t>
-            </a:r>
-            <a:endParaRPr lang="en-US" altLang="en-US" sz="2000">
+              <a:t>ơn hàng đơn giản và hiệu quả</a:t>
+            </a:r>
+            <a:endParaRPr lang="en-US" altLang="en-US" sz="2400">
               <a:latin typeface="Times New Roman" panose="02020603050405020304" charset="0"/>
               <a:cs typeface="Times New Roman" panose="02020603050405020304" charset="0"/>
             </a:endParaRPr>
@@ -4425,63 +4118,6 @@
       <p:grpSpPr/>
       <p:sp>
         <p:nvSpPr>
-          <p:cNvPr id="20" name="Freeform 2"/>
-          <p:cNvSpPr/>
-          <p:nvPr/>
-        </p:nvSpPr>
-        <p:spPr>
-          <a:xfrm>
-            <a:off x="5876290" y="-554990"/>
-            <a:ext cx="12322810" cy="10460990"/>
-          </a:xfrm>
-          <a:custGeom>
-            <a:avLst/>
-            <a:gdLst/>
-            <a:ahLst/>
-            <a:cxnLst/>
-            <a:rect l="l" t="t" r="r" b="b"/>
-            <a:pathLst>
-              <a:path w="11810023" h="10461246">
-                <a:moveTo>
-                  <a:pt x="0" y="0"/>
-                </a:moveTo>
-                <a:lnTo>
-                  <a:pt x="11810023" y="0"/>
-                </a:lnTo>
-                <a:lnTo>
-                  <a:pt x="11810023" y="10461246"/>
-                </a:lnTo>
-                <a:lnTo>
-                  <a:pt x="0" y="10461246"/>
-                </a:lnTo>
-                <a:lnTo>
-                  <a:pt x="0" y="0"/>
-                </a:lnTo>
-                <a:close/>
-              </a:path>
-            </a:pathLst>
-          </a:custGeom>
-          <a:blipFill>
-            <a:blip r:embed="rId1">
-              <a:extLst>
-                <a:ext uri="{96DAC541-7B7A-43D3-8B79-37D633B846F1}">
-                  <asvg:svgBlip xmlns:asvg="http://schemas.microsoft.com/office/drawing/2016/SVG/main" r:embed="rId2"/>
-                </a:ext>
-              </a:extLst>
-            </a:blip>
-            <a:stretch>
-              <a:fillRect/>
-            </a:stretch>
-          </a:blipFill>
-          <a:ln cap="sq">
-            <a:noFill/>
-            <a:prstDash val="solid"/>
-            <a:miter/>
-          </a:ln>
-        </p:spPr>
-      </p:sp>
-      <p:sp>
-        <p:nvSpPr>
           <p:cNvPr id="2" name="Title 1"/>
           <p:cNvSpPr>
             <a:spLocks noGrp="1"/>
@@ -4499,9 +4135,23 @@
         <p:txBody>
           <a:bodyPr/>
           <a:p>
-            <a:r>
-              <a:rPr lang="en-US"/>
-              <a:t>Công nghệ sử dụng</a:t>
+            <a:pPr algn="ctr"/>
+            <a:r>
+              <a:rPr lang="en-US" b="1">
+                <a:solidFill>
+                  <a:schemeClr val="accent1"/>
+                </a:solidFill>
+                <a:effectLst>
+                  <a:outerShdw blurRad="38100" dist="38100" dir="2700000" algn="tl">
+                    <a:srgbClr val="000000">
+                      <a:alpha val="43137"/>
+                    </a:srgbClr>
+                  </a:outerShdw>
+                </a:effectLst>
+                <a:latin typeface="Times New Roman" panose="02020603050405020304" charset="0"/>
+                <a:cs typeface="Times New Roman" panose="02020603050405020304" charset="0"/>
+              </a:rPr>
+              <a:t>CÔNG NGHỆ SỬ DỤNG</a:t>
             </a:r>
             <a:endParaRPr lang="en-US"/>
           </a:p>
@@ -4516,10 +4166,10 @@
           <p:nvPr/>
         </p:nvPicPr>
         <p:blipFill>
-          <a:blip r:embed="rId3">
+          <a:blip r:embed="rId1">
             <a:extLst>
               <a:ext uri="{96DAC541-7B7A-43D3-8B79-37D633B846F1}">
-                <asvg:svgBlip xmlns:asvg="http://schemas.microsoft.com/office/drawing/2016/SVG/main" r:embed="rId4"/>
+                <asvg:svgBlip xmlns:asvg="http://schemas.microsoft.com/office/drawing/2016/SVG/main" r:embed="rId2"/>
               </a:ext>
             </a:extLst>
           </a:blip>
@@ -4530,8 +4180,8 @@
         </p:blipFill>
         <p:spPr>
           <a:xfrm>
-            <a:off x="726440" y="3411855"/>
-            <a:ext cx="2286000" cy="1096042"/>
+            <a:off x="8815070" y="1438910"/>
+            <a:ext cx="2675255" cy="1282700"/>
           </a:xfrm>
           <a:prstGeom prst="rect">
             <a:avLst/>
@@ -4541,6 +4191,54 @@
       <p:pic>
         <p:nvPicPr>
           <p:cNvPr id="11" name="Picture 10" descr="logop"/>
+          <p:cNvPicPr>
+            <a:picLocks noChangeAspect="1"/>
+          </p:cNvPicPr>
+          <p:nvPr/>
+        </p:nvPicPr>
+        <p:blipFill>
+          <a:blip r:embed="rId3"/>
+          <a:stretch>
+            <a:fillRect/>
+          </a:stretch>
+        </p:blipFill>
+        <p:spPr>
+          <a:xfrm>
+            <a:off x="4655185" y="1421130"/>
+            <a:ext cx="2507615" cy="1300480"/>
+          </a:xfrm>
+          <a:prstGeom prst="rect">
+            <a:avLst/>
+          </a:prstGeom>
+        </p:spPr>
+      </p:pic>
+      <p:pic>
+        <p:nvPicPr>
+          <p:cNvPr id="12" name="Picture 11" descr="logor"/>
+          <p:cNvPicPr>
+            <a:picLocks noChangeAspect="1"/>
+          </p:cNvPicPr>
+          <p:nvPr/>
+        </p:nvPicPr>
+        <p:blipFill>
+          <a:blip r:embed="rId4"/>
+          <a:stretch>
+            <a:fillRect/>
+          </a:stretch>
+        </p:blipFill>
+        <p:spPr>
+          <a:xfrm>
+            <a:off x="716280" y="1435735"/>
+            <a:ext cx="2286000" cy="1285875"/>
+          </a:xfrm>
+          <a:prstGeom prst="rect">
+            <a:avLst/>
+          </a:prstGeom>
+        </p:spPr>
+      </p:pic>
+      <p:pic>
+        <p:nvPicPr>
+          <p:cNvPr id="4" name="Picture 3" descr="logojwt"/>
           <p:cNvPicPr>
             <a:picLocks noChangeAspect="1"/>
           </p:cNvPicPr>
@@ -4554,8 +4252,8 @@
         </p:blipFill>
         <p:spPr>
           <a:xfrm>
-            <a:off x="716915" y="5198110"/>
-            <a:ext cx="2286000" cy="1185508"/>
+            <a:off x="8125460" y="3862705"/>
+            <a:ext cx="3703320" cy="2316480"/>
           </a:xfrm>
           <a:prstGeom prst="rect">
             <a:avLst/>
@@ -4564,7 +4262,7 @@
       </p:pic>
       <p:pic>
         <p:nvPicPr>
-          <p:cNvPr id="12" name="Picture 11" descr="logor"/>
+          <p:cNvPr id="6" name="Picture 5" descr="logov"/>
           <p:cNvPicPr>
             <a:picLocks noChangeAspect="1"/>
           </p:cNvPicPr>
@@ -4578,451 +4276,38 @@
         </p:blipFill>
         <p:spPr>
           <a:xfrm>
-            <a:off x="716280" y="1435735"/>
-            <a:ext cx="2286000" cy="1285875"/>
+            <a:off x="4048760" y="3395345"/>
+            <a:ext cx="3251200" cy="3251200"/>
           </a:xfrm>
           <a:prstGeom prst="rect">
             <a:avLst/>
           </a:prstGeom>
         </p:spPr>
       </p:pic>
-      <p:sp>
-        <p:nvSpPr>
-          <p:cNvPr id="16" name="Rounded Rectangle 15"/>
-          <p:cNvSpPr/>
+      <p:pic>
+        <p:nvPicPr>
+          <p:cNvPr id="7" name="Picture 6" descr="logotailwin"/>
+          <p:cNvPicPr>
+            <a:picLocks noChangeAspect="1"/>
+          </p:cNvPicPr>
           <p:nvPr/>
-        </p:nvSpPr>
-        <p:spPr>
-          <a:xfrm>
-            <a:off x="4469765" y="1496060"/>
-            <a:ext cx="7162800" cy="1181735"/>
-          </a:xfrm>
-          <a:prstGeom prst="roundRect">
+        </p:nvPicPr>
+        <p:blipFill>
+          <a:blip r:embed="rId7"/>
+          <a:stretch>
+            <a:fillRect/>
+          </a:stretch>
+        </p:blipFill>
+        <p:spPr>
+          <a:xfrm>
+            <a:off x="494030" y="4379595"/>
+            <a:ext cx="2508250" cy="1282700"/>
+          </a:xfrm>
+          <a:prstGeom prst="rect">
             <a:avLst/>
           </a:prstGeom>
-          <a:solidFill>
-            <a:schemeClr val="bg1">
-              <a:lumMod val="85000"/>
-            </a:schemeClr>
-          </a:solidFill>
-          <a:ln>
-            <a:solidFill>
-              <a:schemeClr val="bg1">
-                <a:lumMod val="65000"/>
-              </a:schemeClr>
-            </a:solidFill>
-          </a:ln>
-        </p:spPr>
-        <p:style>
-          <a:lnRef idx="2">
-            <a:schemeClr val="accent1">
-              <a:lumMod val="75000"/>
-            </a:schemeClr>
-          </a:lnRef>
-          <a:fillRef idx="1">
-            <a:schemeClr val="accent1"/>
-          </a:fillRef>
-          <a:effectRef idx="0">
-            <a:srgbClr val="FFFFFF"/>
-          </a:effectRef>
-          <a:fontRef idx="minor">
-            <a:schemeClr val="lt1"/>
-          </a:fontRef>
-        </p:style>
-        <p:txBody>
-          <a:bodyPr rtlCol="0" anchor="t" anchorCtr="0"/>
-          <a:p>
-            <a:pPr marL="285750" indent="-285750" algn="l">
-              <a:lnSpc>
-                <a:spcPct val="150000"/>
-              </a:lnSpc>
-              <a:buFont typeface="Arial" panose="020B0704020202020204" pitchFamily="34" charset="0"/>
-              <a:buChar char="•"/>
-            </a:pPr>
-            <a:r>
-              <a:rPr lang="en-US" altLang="en-US" sz="2000">
-                <a:solidFill>
-                  <a:schemeClr val="tx1"/>
-                </a:solidFill>
-                <a:latin typeface="Times New Roman" panose="02020603050405020304" charset="0"/>
-                <a:cs typeface="Times New Roman" panose="02020603050405020304" charset="0"/>
-              </a:rPr>
-              <a:t>Xây dựng website dạng SPA, thao tác m</a:t>
-            </a:r>
-            <a:r>
-              <a:rPr lang="en-US" altLang="en-US" sz="2000">
-                <a:solidFill>
-                  <a:schemeClr val="tx1"/>
-                </a:solidFill>
-                <a:latin typeface="Times New Roman" panose="02020603050405020304" charset="0"/>
-                <a:cs typeface="Times New Roman" panose="02020603050405020304" charset="0"/>
-              </a:rPr>
-              <a:t>ư</a:t>
-            </a:r>
-            <a:r>
-              <a:rPr lang="en-US" altLang="en-US" sz="2000">
-                <a:solidFill>
-                  <a:schemeClr val="tx1"/>
-                </a:solidFill>
-                <a:latin typeface="Times New Roman" panose="02020603050405020304" charset="0"/>
-                <a:cs typeface="Times New Roman" panose="02020603050405020304" charset="0"/>
-              </a:rPr>
-              <a:t>ợt và ít tải lại trang</a:t>
-            </a:r>
-            <a:endParaRPr lang="en-US" altLang="en-US" sz="2000">
-              <a:solidFill>
-                <a:schemeClr val="tx1"/>
-              </a:solidFill>
-              <a:latin typeface="Times New Roman" panose="02020603050405020304" charset="0"/>
-              <a:cs typeface="Times New Roman" panose="02020603050405020304" charset="0"/>
-            </a:endParaRPr>
-          </a:p>
-          <a:p>
-            <a:pPr marL="285750" indent="-285750" algn="l">
-              <a:lnSpc>
-                <a:spcPct val="150000"/>
-              </a:lnSpc>
-              <a:buFont typeface="Arial" panose="020B0704020202020204" pitchFamily="34" charset="0"/>
-              <a:buChar char="•"/>
-            </a:pPr>
-            <a:r>
-              <a:rPr lang="en-US" altLang="en-US" sz="2000">
-                <a:solidFill>
-                  <a:schemeClr val="tx1"/>
-                </a:solidFill>
-                <a:latin typeface="Times New Roman" panose="02020603050405020304" charset="0"/>
-                <a:cs typeface="Times New Roman" panose="02020603050405020304" charset="0"/>
-              </a:rPr>
-              <a:t>Dễ mở rộng sang ứng dụng di </a:t>
-            </a:r>
-            <a:r>
-              <a:rPr lang="en-US" altLang="en-US" sz="2000">
-                <a:solidFill>
-                  <a:schemeClr val="tx1"/>
-                </a:solidFill>
-                <a:latin typeface="Times New Roman" panose="02020603050405020304" charset="0"/>
-                <a:cs typeface="Times New Roman" panose="02020603050405020304" charset="0"/>
-              </a:rPr>
-              <a:t>đ</a:t>
-            </a:r>
-            <a:r>
-              <a:rPr lang="en-US" altLang="en-US" sz="2000">
-                <a:solidFill>
-                  <a:schemeClr val="tx1"/>
-                </a:solidFill>
-                <a:latin typeface="Times New Roman" panose="02020603050405020304" charset="0"/>
-                <a:cs typeface="Times New Roman" panose="02020603050405020304" charset="0"/>
-              </a:rPr>
-              <a:t>ộng với React Native</a:t>
-            </a:r>
-            <a:endParaRPr lang="en-US" altLang="en-US" sz="2000">
-              <a:solidFill>
-                <a:schemeClr val="tx1"/>
-              </a:solidFill>
-              <a:latin typeface="Times New Roman" panose="02020603050405020304" charset="0"/>
-              <a:cs typeface="Times New Roman" panose="02020603050405020304" charset="0"/>
-            </a:endParaRPr>
-          </a:p>
-        </p:txBody>
-      </p:sp>
-      <p:sp>
-        <p:nvSpPr>
-          <p:cNvPr id="18" name="Rounded Rectangle 17"/>
-          <p:cNvSpPr/>
-          <p:nvPr/>
-        </p:nvSpPr>
-        <p:spPr>
-          <a:xfrm>
-            <a:off x="4469765" y="3355975"/>
-            <a:ext cx="7162800" cy="1181735"/>
-          </a:xfrm>
-          <a:prstGeom prst="roundRect">
-            <a:avLst/>
-          </a:prstGeom>
-          <a:solidFill>
-            <a:schemeClr val="bg1">
-              <a:lumMod val="85000"/>
-            </a:schemeClr>
-          </a:solidFill>
-          <a:ln>
-            <a:solidFill>
-              <a:schemeClr val="bg1">
-                <a:lumMod val="65000"/>
-              </a:schemeClr>
-            </a:solidFill>
-          </a:ln>
-        </p:spPr>
-        <p:style>
-          <a:lnRef idx="2">
-            <a:schemeClr val="accent1">
-              <a:lumMod val="75000"/>
-            </a:schemeClr>
-          </a:lnRef>
-          <a:fillRef idx="1">
-            <a:schemeClr val="accent1"/>
-          </a:fillRef>
-          <a:effectRef idx="0">
-            <a:srgbClr val="FFFFFF"/>
-          </a:effectRef>
-          <a:fontRef idx="minor">
-            <a:schemeClr val="lt1"/>
-          </a:fontRef>
-        </p:style>
-        <p:txBody>
-          <a:bodyPr rtlCol="0" anchor="t" anchorCtr="0"/>
-          <a:p>
-            <a:pPr marL="285750" indent="-285750" algn="l">
-              <a:lnSpc>
-                <a:spcPct val="150000"/>
-              </a:lnSpc>
-              <a:buFont typeface="Arial" panose="020B0704020202020204" pitchFamily="34" charset="0"/>
-              <a:buChar char="•"/>
-            </a:pPr>
-            <a:r>
-              <a:rPr lang="en-US" altLang="en-US" sz="2000">
-                <a:solidFill>
-                  <a:schemeClr val="tx1"/>
-                </a:solidFill>
-                <a:latin typeface="Times New Roman" panose="02020603050405020304" charset="0"/>
-                <a:cs typeface="Times New Roman" panose="02020603050405020304" charset="0"/>
-              </a:rPr>
-              <a:t>Xử l</a:t>
-            </a:r>
-            <a:r>
-              <a:rPr lang="en-US" altLang="en-US" sz="2000">
-                <a:solidFill>
-                  <a:schemeClr val="tx1"/>
-                </a:solidFill>
-                <a:latin typeface="Times New Roman" panose="02020603050405020304" charset="0"/>
-                <a:cs typeface="Times New Roman" panose="02020603050405020304" charset="0"/>
-              </a:rPr>
-              <a:t>ý</a:t>
-            </a:r>
-            <a:r>
-              <a:rPr lang="en-US" altLang="en-US" sz="2000">
-                <a:solidFill>
-                  <a:schemeClr val="tx1"/>
-                </a:solidFill>
-                <a:latin typeface="Times New Roman" panose="02020603050405020304" charset="0"/>
-                <a:cs typeface="Times New Roman" panose="02020603050405020304" charset="0"/>
-              </a:rPr>
-              <a:t> nhanh, phù hợp cho hệ thống nhiều ng</a:t>
-            </a:r>
-            <a:r>
-              <a:rPr lang="en-US" altLang="en-US" sz="2000">
-                <a:solidFill>
-                  <a:schemeClr val="tx1"/>
-                </a:solidFill>
-                <a:latin typeface="Times New Roman" panose="02020603050405020304" charset="0"/>
-                <a:cs typeface="Times New Roman" panose="02020603050405020304" charset="0"/>
-              </a:rPr>
-              <a:t>ư</a:t>
-            </a:r>
-            <a:r>
-              <a:rPr lang="en-US" altLang="en-US" sz="2000">
-                <a:solidFill>
-                  <a:schemeClr val="tx1"/>
-                </a:solidFill>
-                <a:latin typeface="Times New Roman" panose="02020603050405020304" charset="0"/>
-                <a:cs typeface="Times New Roman" panose="02020603050405020304" charset="0"/>
-              </a:rPr>
-              <a:t>ời dùng</a:t>
-            </a:r>
-            <a:endParaRPr lang="en-US" altLang="en-US" sz="2000">
-              <a:solidFill>
-                <a:schemeClr val="tx1"/>
-              </a:solidFill>
-              <a:latin typeface="Times New Roman" panose="02020603050405020304" charset="0"/>
-              <a:cs typeface="Times New Roman" panose="02020603050405020304" charset="0"/>
-            </a:endParaRPr>
-          </a:p>
-          <a:p>
-            <a:pPr marL="285750" indent="-285750" algn="l">
-              <a:lnSpc>
-                <a:spcPct val="150000"/>
-              </a:lnSpc>
-              <a:buFont typeface="Arial" panose="020B0704020202020204" pitchFamily="34" charset="0"/>
-              <a:buChar char="•"/>
-            </a:pPr>
-            <a:r>
-              <a:rPr lang="en-US" altLang="en-US" sz="2000">
-                <a:solidFill>
-                  <a:schemeClr val="tx1"/>
-                </a:solidFill>
-                <a:latin typeface="Times New Roman" panose="02020603050405020304" charset="0"/>
-                <a:cs typeface="Times New Roman" panose="02020603050405020304" charset="0"/>
-              </a:rPr>
-              <a:t>Dễ phát triển và tích hợp các dịch vụ nh</a:t>
-            </a:r>
-            <a:r>
-              <a:rPr lang="en-US" altLang="en-US" sz="2000">
-                <a:solidFill>
-                  <a:schemeClr val="tx1"/>
-                </a:solidFill>
-                <a:latin typeface="Times New Roman" panose="02020603050405020304" charset="0"/>
-                <a:cs typeface="Times New Roman" panose="02020603050405020304" charset="0"/>
-              </a:rPr>
-              <a:t>ư</a:t>
-            </a:r>
-            <a:r>
-              <a:rPr lang="en-US" altLang="en-US" sz="2000">
-                <a:solidFill>
-                  <a:schemeClr val="tx1"/>
-                </a:solidFill>
-                <a:latin typeface="Times New Roman" panose="02020603050405020304" charset="0"/>
-                <a:cs typeface="Times New Roman" panose="02020603050405020304" charset="0"/>
-              </a:rPr>
-              <a:t> thanh toán, email</a:t>
-            </a:r>
-            <a:endParaRPr lang="en-US" altLang="en-US" sz="2000">
-              <a:solidFill>
-                <a:schemeClr val="tx1"/>
-              </a:solidFill>
-              <a:latin typeface="Times New Roman" panose="02020603050405020304" charset="0"/>
-              <a:cs typeface="Times New Roman" panose="02020603050405020304" charset="0"/>
-            </a:endParaRPr>
-          </a:p>
-        </p:txBody>
-      </p:sp>
-      <p:sp>
-        <p:nvSpPr>
-          <p:cNvPr id="19" name="Rounded Rectangle 18"/>
-          <p:cNvSpPr/>
-          <p:nvPr/>
-        </p:nvSpPr>
-        <p:spPr>
-          <a:xfrm>
-            <a:off x="4469765" y="5215255"/>
-            <a:ext cx="7162800" cy="1181735"/>
-          </a:xfrm>
-          <a:prstGeom prst="roundRect">
-            <a:avLst/>
-          </a:prstGeom>
-          <a:solidFill>
-            <a:schemeClr val="bg1">
-              <a:lumMod val="85000"/>
-            </a:schemeClr>
-          </a:solidFill>
-          <a:ln>
-            <a:solidFill>
-              <a:schemeClr val="bg1">
-                <a:lumMod val="65000"/>
-              </a:schemeClr>
-            </a:solidFill>
-          </a:ln>
-        </p:spPr>
-        <p:style>
-          <a:lnRef idx="2">
-            <a:schemeClr val="accent1">
-              <a:lumMod val="75000"/>
-            </a:schemeClr>
-          </a:lnRef>
-          <a:fillRef idx="1">
-            <a:schemeClr val="accent1"/>
-          </a:fillRef>
-          <a:effectRef idx="0">
-            <a:srgbClr val="FFFFFF"/>
-          </a:effectRef>
-          <a:fontRef idx="minor">
-            <a:schemeClr val="lt1"/>
-          </a:fontRef>
-        </p:style>
-        <p:txBody>
-          <a:bodyPr rtlCol="0" anchor="t" anchorCtr="0"/>
-          <a:p>
-            <a:pPr marL="285750" indent="-285750" algn="l">
-              <a:lnSpc>
-                <a:spcPct val="150000"/>
-              </a:lnSpc>
-              <a:buFont typeface="Arial" panose="020B0704020202020204" pitchFamily="34" charset="0"/>
-              <a:buChar char="•"/>
-            </a:pPr>
-            <a:r>
-              <a:rPr lang="en-US" altLang="en-US" sz="2000">
-                <a:solidFill>
-                  <a:schemeClr val="tx1"/>
-                </a:solidFill>
-                <a:latin typeface="Times New Roman" panose="02020603050405020304" charset="0"/>
-                <a:cs typeface="Times New Roman" panose="02020603050405020304" charset="0"/>
-              </a:rPr>
-              <a:t>Quản l</a:t>
-            </a:r>
-            <a:r>
-              <a:rPr lang="en-US" altLang="en-US" sz="2000">
-                <a:solidFill>
-                  <a:schemeClr val="tx1"/>
-                </a:solidFill>
-                <a:latin typeface="Times New Roman" panose="02020603050405020304" charset="0"/>
-                <a:cs typeface="Times New Roman" panose="02020603050405020304" charset="0"/>
-              </a:rPr>
-              <a:t>ý</a:t>
-            </a:r>
-            <a:r>
-              <a:rPr lang="en-US" altLang="en-US" sz="2000">
-                <a:solidFill>
-                  <a:schemeClr val="tx1"/>
-                </a:solidFill>
-                <a:latin typeface="Times New Roman" panose="02020603050405020304" charset="0"/>
-                <a:cs typeface="Times New Roman" panose="02020603050405020304" charset="0"/>
-              </a:rPr>
-              <a:t> dữ liệu quan hệ chặt chẽ, </a:t>
-            </a:r>
-            <a:r>
-              <a:rPr lang="en-US" altLang="en-US" sz="2000">
-                <a:solidFill>
-                  <a:schemeClr val="tx1"/>
-                </a:solidFill>
-                <a:latin typeface="Times New Roman" panose="02020603050405020304" charset="0"/>
-                <a:cs typeface="Times New Roman" panose="02020603050405020304" charset="0"/>
-              </a:rPr>
-              <a:t>đ</a:t>
-            </a:r>
-            <a:r>
-              <a:rPr lang="en-US" altLang="en-US" sz="2000">
-                <a:solidFill>
-                  <a:schemeClr val="tx1"/>
-                </a:solidFill>
-                <a:latin typeface="Times New Roman" panose="02020603050405020304" charset="0"/>
-                <a:cs typeface="Times New Roman" panose="02020603050405020304" charset="0"/>
-              </a:rPr>
-              <a:t>ảm bảo tính toàn vẹn</a:t>
-            </a:r>
-            <a:endParaRPr lang="en-US" altLang="en-US" sz="2000">
-              <a:solidFill>
-                <a:schemeClr val="tx1"/>
-              </a:solidFill>
-              <a:latin typeface="Times New Roman" panose="02020603050405020304" charset="0"/>
-              <a:cs typeface="Times New Roman" panose="02020603050405020304" charset="0"/>
-            </a:endParaRPr>
-          </a:p>
-          <a:p>
-            <a:pPr marL="285750" indent="-285750" algn="l">
-              <a:lnSpc>
-                <a:spcPct val="150000"/>
-              </a:lnSpc>
-              <a:buFont typeface="Arial" panose="020B0704020202020204" pitchFamily="34" charset="0"/>
-              <a:buChar char="•"/>
-            </a:pPr>
-            <a:r>
-              <a:rPr lang="en-US" altLang="en-US" sz="2000">
-                <a:solidFill>
-                  <a:schemeClr val="tx1"/>
-                </a:solidFill>
-                <a:latin typeface="Times New Roman" panose="02020603050405020304" charset="0"/>
-                <a:cs typeface="Times New Roman" panose="02020603050405020304" charset="0"/>
-              </a:rPr>
-              <a:t>Phù hợp cho hệ thống có nhiều bảng và mối quan hệ</a:t>
-            </a:r>
-            <a:endParaRPr lang="en-US" altLang="en-US" sz="2000">
-              <a:solidFill>
-                <a:schemeClr val="tx1"/>
-              </a:solidFill>
-              <a:latin typeface="Times New Roman" panose="02020603050405020304" charset="0"/>
-              <a:cs typeface="Times New Roman" panose="02020603050405020304" charset="0"/>
-            </a:endParaRPr>
-          </a:p>
-        </p:txBody>
-      </p:sp>
+        </p:spPr>
+      </p:pic>
     </p:spTree>
   </p:cSld>
   <p:clrMapOvr>
@@ -5060,11 +4345,42 @@
         <p:txBody>
           <a:bodyPr/>
           <a:p>
-            <a:r>
-              <a:rPr lang="en-US"/>
+            <a:pPr algn="ctr">
+              <a:buClrTx/>
+              <a:buSzTx/>
+              <a:buFontTx/>
+            </a:pPr>
+            <a:r>
+              <a:rPr lang="en-US" b="1">
+                <a:solidFill>
+                  <a:schemeClr val="accent1"/>
+                </a:solidFill>
+                <a:effectLst>
+                  <a:outerShdw blurRad="38100" dist="38100" dir="2700000" algn="tl">
+                    <a:srgbClr val="000000">
+                      <a:alpha val="43137"/>
+                    </a:srgbClr>
+                  </a:outerShdw>
+                </a:effectLst>
+                <a:latin typeface="Times New Roman" panose="02020603050405020304" charset="0"/>
+                <a:cs typeface="Times New Roman" panose="02020603050405020304" charset="0"/>
+              </a:rPr>
               <a:t>Sơ đồ usecase tổng quát</a:t>
             </a:r>
-            <a:endParaRPr lang="en-US"/>
+            <a:endParaRPr lang="en-US" b="1">
+              <a:solidFill>
+                <a:schemeClr val="accent1"/>
+              </a:solidFill>
+              <a:effectLst>
+                <a:outerShdw blurRad="38100" dist="38100" dir="2700000" algn="tl">
+                  <a:srgbClr val="000000">
+                    <a:alpha val="43137"/>
+                  </a:srgbClr>
+                </a:outerShdw>
+              </a:effectLst>
+              <a:latin typeface="Times New Roman" panose="02020603050405020304" charset="0"/>
+              <a:cs typeface="Times New Roman" panose="02020603050405020304" charset="0"/>
+            </a:endParaRPr>
           </a:p>
         </p:txBody>
       </p:sp>
@@ -5573,14 +4889,39 @@
         <p:txBody>
           <a:bodyPr/>
           <a:p>
-            <a:r>
-              <a:rPr lang="en-US">
+            <a:pPr algn="ctr">
+              <a:buClrTx/>
+              <a:buSzTx/>
+              <a:buFontTx/>
+            </a:pPr>
+            <a:r>
+              <a:rPr lang="en-US" b="1">
+                <a:solidFill>
+                  <a:schemeClr val="accent1"/>
+                </a:solidFill>
+                <a:effectLst>
+                  <a:outerShdw blurRad="38100" dist="38100" dir="2700000" algn="tl">
+                    <a:srgbClr val="000000">
+                      <a:alpha val="43137"/>
+                    </a:srgbClr>
+                  </a:outerShdw>
+                </a:effectLst>
                 <a:latin typeface="Times New Roman" panose="02020603050405020304" charset="0"/>
                 <a:cs typeface="Times New Roman" panose="02020603050405020304" charset="0"/>
               </a:rPr>
               <a:t>Sơ đồ tuần tự và sơ đồ hoạt động</a:t>
             </a:r>
-            <a:endParaRPr lang="en-US">
+            <a:endParaRPr lang="en-US" b="1">
+              <a:solidFill>
+                <a:schemeClr val="accent1"/>
+              </a:solidFill>
+              <a:effectLst>
+                <a:outerShdw blurRad="38100" dist="38100" dir="2700000" algn="tl">
+                  <a:srgbClr val="000000">
+                    <a:alpha val="43137"/>
+                  </a:srgbClr>
+                </a:outerShdw>
+              </a:effectLst>
               <a:latin typeface="Times New Roman" panose="02020603050405020304" charset="0"/>
               <a:cs typeface="Times New Roman" panose="02020603050405020304" charset="0"/>
             </a:endParaRPr>
@@ -5791,16 +5132,39 @@
           <a:bodyPr/>
           <a:p>
             <a:r>
-              <a:rPr lang="en-US">
-                <a:latin typeface="Times New Roman" panose="02020603050405020304" charset="0"/>
-                <a:cs typeface="Times New Roman" panose="02020603050405020304" charset="0"/>
-              </a:rPr>
-              <a:t>Hạn chế</a:t>
-            </a:r>
-            <a:endParaRPr lang="en-US">
-              <a:latin typeface="Times New Roman" panose="02020603050405020304" charset="0"/>
-              <a:cs typeface="Times New Roman" panose="02020603050405020304" charset="0"/>
-            </a:endParaRPr>
+              <a:rPr lang="en-US" altLang="en-US"/>
+              <a:t>Kết quả</a:t>
+            </a:r>
+            <a:endParaRPr lang="en-US" altLang="en-US"/>
+          </a:p>
+        </p:txBody>
+      </p:sp>
+      <p:sp>
+        <p:nvSpPr>
+          <p:cNvPr id="3" name="Text Box 2"/>
+          <p:cNvSpPr txBox="1"/>
+          <p:nvPr/>
+        </p:nvSpPr>
+        <p:spPr>
+          <a:xfrm>
+            <a:off x="1741170" y="1849755"/>
+            <a:ext cx="4064000" cy="368300"/>
+          </a:xfrm>
+          <a:prstGeom prst="rect">
+            <a:avLst/>
+          </a:prstGeom>
+          <a:noFill/>
+        </p:spPr>
+        <p:txBody>
+          <a:bodyPr wrap="square" rtlCol="0">
+            <a:spAutoFit/>
+          </a:bodyPr>
+          <a:p>
+            <a:r>
+              <a:rPr lang="en-US"/>
+              <a:t>Đã Triền khai </a:t>
+            </a:r>
+            <a:endParaRPr lang="en-US"/>
           </a:p>
         </p:txBody>
       </p:sp>
@@ -5837,10 +5201,66 @@
           <a:bodyPr/>
           <a:p>
             <a:r>
-              <a:rPr lang="en-US" altLang="en-US"/>
-              <a:t>Kết quả</a:t>
-            </a:r>
-            <a:endParaRPr lang="en-US" altLang="en-US"/>
+              <a:rPr lang="en-US">
+                <a:latin typeface="Times New Roman" panose="02020603050405020304" charset="0"/>
+                <a:cs typeface="Times New Roman" panose="02020603050405020304" charset="0"/>
+              </a:rPr>
+              <a:t>Hạn chế</a:t>
+            </a:r>
+            <a:endParaRPr lang="en-US">
+              <a:latin typeface="Times New Roman" panose="02020603050405020304" charset="0"/>
+              <a:cs typeface="Times New Roman" panose="02020603050405020304" charset="0"/>
+            </a:endParaRPr>
+          </a:p>
+        </p:txBody>
+      </p:sp>
+      <p:sp>
+        <p:nvSpPr>
+          <p:cNvPr id="4" name="Text Box 3"/>
+          <p:cNvSpPr txBox="1"/>
+          <p:nvPr/>
+        </p:nvSpPr>
+        <p:spPr>
+          <a:xfrm>
+            <a:off x="3319780" y="2158365"/>
+            <a:ext cx="4064000" cy="1753235"/>
+          </a:xfrm>
+          <a:prstGeom prst="rect">
+            <a:avLst/>
+          </a:prstGeom>
+          <a:noFill/>
+        </p:spPr>
+        <p:txBody>
+          <a:bodyPr wrap="square" rtlCol="0">
+            <a:spAutoFit/>
+          </a:bodyPr>
+          <a:p>
+            <a:r>
+              <a:rPr lang="en-US"/>
+              <a:t>1. Báo cáo chưa hoàn thiện</a:t>
+            </a:r>
+            <a:endParaRPr lang="en-US"/>
+          </a:p>
+          <a:p>
+            <a:r>
+              <a:rPr lang="en-US"/>
+              <a:t>2. Chưa đáp ứng khả năng chịu tải và phản hồi của hệ thống</a:t>
+            </a:r>
+            <a:endParaRPr lang="en-US"/>
+          </a:p>
+          <a:p>
+            <a:r>
+              <a:rPr lang="en-US"/>
+              <a:t>3. Giao diện chưa tối ưu và thân thiện với người dùng</a:t>
+            </a:r>
+            <a:endParaRPr lang="en-US"/>
+          </a:p>
+          <a:p>
+            <a:r>
+              <a:rPr lang="en-US"/>
+              <a:t>4.</a:t>
+            </a:r>
+            <a:endParaRPr lang="en-US"/>
           </a:p>
         </p:txBody>
       </p:sp>
